--- a/Lunes-15/S02_Lunes-15_3_Reel_Adivina-4h_9x16.pptx
+++ b/Lunes-15/S02_Lunes-15_3_Reel_Adivina-4h_9x16.pptx
@@ -3301,7 +3301,7 @@
                 </a:solidFill>
                 <a:latin typeface="Inter"/>
               </a:rPr>
-              <a:t>Adivina qué se puede hacer en 4 horas.</a:t>
+              <a:t>Adivina qué se hace en 4 horas con Notaly.</a:t>
             </a:r>
           </a:p>
         </p:txBody>
@@ -3334,7 +3334,7 @@
       <p:grpSpPr/>
       <p:pic>
         <p:nvPicPr>
-          <p:cNvPr id="2" name="Picture 1" descr="reloj.png"/>
+          <p:cNvPr id="2" name="Picture 1" descr="sello.png"/>
           <p:cNvPicPr>
             <a:picLocks noChangeAspect="1"/>
           </p:cNvPicPr>
@@ -3348,8 +3348,8 @@
         </p:blipFill>
         <p:spPr>
           <a:xfrm>
-            <a:off x="0" y="-57150"/>
-            <a:ext cx="8229600" cy="14744700"/>
+            <a:off x="-1347216" y="0"/>
+            <a:ext cx="10924032" cy="14630400"/>
           </a:xfrm>
           <a:prstGeom prst="rect">
             <a:avLst/>
@@ -3410,7 +3410,7 @@
         </p:nvSpPr>
         <p:spPr>
           <a:xfrm>
-            <a:off x="777240" y="3424936"/>
+            <a:off x="777240" y="2694686"/>
             <a:ext cx="1371600" cy="146304"/>
           </a:xfrm>
           <a:prstGeom prst="rect">
@@ -3454,8 +3454,8 @@
         </p:nvSpPr>
         <p:spPr>
           <a:xfrm>
-            <a:off x="777240" y="3882136"/>
-            <a:ext cx="6675120" cy="6134608"/>
+            <a:off x="777240" y="3151886"/>
+            <a:ext cx="6675120" cy="7595108"/>
           </a:xfrm>
           <a:prstGeom prst="rect">
             <a:avLst/>
@@ -3480,7 +3480,7 @@
                 </a:solidFill>
                 <a:latin typeface="Inter"/>
               </a:rPr>
-              <a:t>Pista: no es lo que crees.</a:t>
+              <a:t>Tu contrato, visado por un abogado.</a:t>
             </a:r>
           </a:p>
         </p:txBody>
@@ -3645,7 +3645,7 @@
         </p:nvSpPr>
         <p:spPr>
           <a:xfrm>
-            <a:off x="777240" y="4512373"/>
+            <a:off x="777240" y="4798124"/>
             <a:ext cx="1371600" cy="146304"/>
           </a:xfrm>
           <a:prstGeom prst="rect">
@@ -3689,8 +3689,8 @@
         </p:nvSpPr>
         <p:spPr>
           <a:xfrm>
-            <a:off x="777240" y="4969573"/>
-            <a:ext cx="6675120" cy="3959733"/>
+            <a:off x="777240" y="5255324"/>
+            <a:ext cx="6675120" cy="3388232"/>
           </a:xfrm>
           <a:prstGeom prst="rect">
             <a:avLst/>
@@ -3709,13 +3709,13 @@
               </a:lnSpc>
             </a:pPr>
             <a:r>
-              <a:rPr sz="7700" b="1">
+              <a:rPr sz="6500" b="1">
                 <a:solidFill>
                   <a:srgbClr val="FFFFFF"/>
                 </a:solidFill>
                 <a:latin typeface="Inter"/>
               </a:rPr>
-              <a:t>Comenta tu adivinanza.</a:t>
+              <a:t>Míralo ya: notaly.com.ve</a:t>
             </a:r>
           </a:p>
         </p:txBody>

--- a/Lunes-15/S02_Lunes-15_3_Reel_Adivina-4h_9x16.pptx
+++ b/Lunes-15/S02_Lunes-15_3_Reel_Adivina-4h_9x16.pptx
@@ -3715,7 +3715,7 @@
                 </a:solidFill>
                 <a:latin typeface="Inter"/>
               </a:rPr>
-              <a:t>Míralo ya: notaly.com.ve</a:t>
+              <a:t>Conócenos: notaly.com.ve</a:t>
             </a:r>
           </a:p>
         </p:txBody>
